--- a/materials/presentation_drafts/presentation_高橋朋子_20260627.pptx
+++ b/materials/presentation_drafts/presentation_高橋朋子_20260627.pptx
@@ -228,7 +228,7 @@
           <a:p>
             <a:fld id="{3443883D-613B-449A-8E41-D9D863F486E3}" type="datetimeFigureOut">
               <a:rPr kumimoji="1" lang="ja-JP" altLang="en-US" smtClean="0"/>
-              <a:t>2026/6/26</a:t>
+              <a:t>2026/9/29</a:t>
             </a:fld>
             <a:endParaRPr kumimoji="1" lang="ja-JP" altLang="en-US"/>
           </a:p>
@@ -39043,10 +39043,10 @@
       </p:sp>
       <p:pic>
         <p:nvPicPr>
-          <p:cNvPr id="101" name="図 100">
+          <p:cNvPr id="12" name="図 11">
             <a:extLst>
               <a:ext uri="{FF2B5EF4-FFF2-40B4-BE49-F238E27FC236}">
-                <a16:creationId xmlns:a16="http://schemas.microsoft.com/office/drawing/2014/main" id="{43D553B4-A77D-F781-FA75-695E6E4329CF}"/>
+                <a16:creationId xmlns:a16="http://schemas.microsoft.com/office/drawing/2014/main" id="{FBD4924F-4E98-636B-F081-7CB6B5E569D8}"/>
               </a:ext>
             </a:extLst>
           </p:cNvPr>
@@ -39063,92 +39063,14 @@
         </p:blipFill>
         <p:spPr>
           <a:xfrm>
-            <a:off x="1536436" y="3369091"/>
-            <a:ext cx="14628850" cy="6639605"/>
-          </a:xfrm>
-          <a:prstGeom prst="rect">
-            <a:avLst/>
-          </a:prstGeom>
-          <a:ln>
-            <a:solidFill>
-              <a:srgbClr val="002E6E"/>
-            </a:solidFill>
-          </a:ln>
+            <a:off x="1692696" y="3146471"/>
+            <a:ext cx="14311600" cy="6797629"/>
+          </a:xfrm>
+          <a:prstGeom prst="rect">
+            <a:avLst/>
+          </a:prstGeom>
         </p:spPr>
       </p:pic>
-      <p:sp>
-        <p:nvSpPr>
-          <p:cNvPr id="4" name="矢印: 右 3">
-            <a:extLst>
-              <a:ext uri="{FF2B5EF4-FFF2-40B4-BE49-F238E27FC236}">
-                <a16:creationId xmlns:a16="http://schemas.microsoft.com/office/drawing/2014/main" id="{3490D73C-1146-2443-6B2C-29B1812C0EFC}"/>
-              </a:ext>
-            </a:extLst>
-          </p:cNvPr>
-          <p:cNvSpPr/>
-          <p:nvPr/>
-        </p:nvSpPr>
-        <p:spPr>
-          <a:xfrm>
-            <a:off x="3760838" y="3624607"/>
-            <a:ext cx="10836905" cy="6128572"/>
-          </a:xfrm>
-          <a:prstGeom prst="rightArrow">
-            <a:avLst>
-              <a:gd name="adj1" fmla="val 52986"/>
-              <a:gd name="adj2" fmla="val 48894"/>
-            </a:avLst>
-          </a:prstGeom>
-          <a:solidFill>
-            <a:srgbClr val="14A0B4"/>
-          </a:solidFill>
-          <a:ln>
-            <a:noFill/>
-          </a:ln>
-        </p:spPr>
-        <p:style>
-          <a:lnRef idx="2">
-            <a:schemeClr val="accent1">
-              <a:shade val="15000"/>
-            </a:schemeClr>
-          </a:lnRef>
-          <a:fillRef idx="1">
-            <a:schemeClr val="accent1"/>
-          </a:fillRef>
-          <a:effectRef idx="0">
-            <a:schemeClr val="accent1"/>
-          </a:effectRef>
-          <a:fontRef idx="minor">
-            <a:schemeClr val="lt1"/>
-          </a:fontRef>
-        </p:style>
-        <p:txBody>
-          <a:bodyPr rtlCol="0" anchor="ctr">
-            <a:noAutofit/>
-          </a:bodyPr>
-          <a:lstStyle/>
-          <a:p>
-            <a:pPr algn="ctr"/>
-            <a:r>
-              <a:rPr kumimoji="1" lang="ja-JP" altLang="en-US" sz="9600" b="1">
-                <a:solidFill>
-                  <a:schemeClr val="bg1"/>
-                </a:solidFill>
-                <a:latin typeface="Meiryo UI" panose="020B0604030504040204" pitchFamily="50" charset="-128"/>
-                <a:ea typeface="Meiryo UI" panose="020B0604030504040204" pitchFamily="50" charset="-128"/>
-              </a:rPr>
-              <a:t>実装予定</a:t>
-            </a:r>
-            <a:endParaRPr kumimoji="1" lang="ja-JP" altLang="en-US" sz="16600" b="1">
-              <a:solidFill>
-                <a:schemeClr val="bg1"/>
-              </a:solidFill>
-              <a:latin typeface="Meiryo UI" panose="020B0604030504040204" pitchFamily="50" charset="-128"/>
-              <a:ea typeface="Meiryo UI" panose="020B0604030504040204" pitchFamily="50" charset="-128"/>
-            </a:endParaRPr>
-          </a:p>
-        </p:txBody>
-      </p:sp>
     </p:spTree>
     <p:extLst>
       <p:ext uri="{BB962C8B-B14F-4D97-AF65-F5344CB8AC3E}">
